--- a/assets/pptx/catalog-294.pptx
+++ b/assets/pptx/catalog-294.pptx
@@ -3269,7 +3269,7 @@
                 <a:ea typeface="Ebrima"/>
                 <a:cs typeface="Ebrima"/>
               </a:rPr>
-              <a:t>በወንድሞቹ ላይ አክብሮታል (2x)</a:t>
+              <a:t>በወንድሞቹ ላይ አክብሮታል 2x</a:t>
             </a:r>
           </a:p>
         </p:txBody>
@@ -3547,7 +3547,7 @@
                 <a:ea typeface="Ebrima"/>
                 <a:cs typeface="Ebrima"/>
               </a:rPr>
-              <a:t>እኔም በሕይወት አለሁ እንደገና (2x)</a:t>
+              <a:t>እኔም በሕይወት አለሁ እንደገና 2x</a:t>
             </a:r>
           </a:p>
           <a:p>
@@ -3655,7 +3655,7 @@
                 <a:ea typeface="Ebrima"/>
                 <a:cs typeface="Ebrima"/>
               </a:rPr>
-              <a:t>እኛም በሕይወት አለን እንደገና(2x)</a:t>
+              <a:t>እኛም በሕይወት አለን እንደገና2x</a:t>
             </a:r>
           </a:p>
         </p:txBody>
@@ -4466,7 +4466,7 @@
                 <a:ea typeface="Ebrima"/>
                 <a:cs typeface="Ebrima"/>
               </a:rPr>
-              <a:t>ዮሴፍ በሕይወት አለ እንደገና (2x)</a:t>
+              <a:t>ዮሴፍ በሕይወት አለ እንደገና 2x</a:t>
             </a:r>
           </a:p>
         </p:txBody>
